--- a/media/resources/files/EkiOrunduuOnduktar_Boluu_SandykTabyshmak_6PvOkjz.pptx
+++ b/media/resources/files/EkiOrunduuOnduktar_Boluu_SandykTabyshmak_6PvOkjz.pptx
@@ -22940,7 +22940,7 @@
             </a:pPr>
             <a:r>
               <a:rPr lang="ru-RU" dirty="0"/>
-              <a:t>Турдуу пикирлер учун ыраазычылык билдиребиз.</a:t>
+              <a:t>Түрдүү пикирлер үчүн ыраазычылык билдиребиз.</a:t>
             </a:r>
           </a:p>
           <a:p>

--- a/media/resources/files/EkiOrunduuOnduktar_Boluu_SandykTabyshmak_6PvOkjz.pptx
+++ b/media/resources/files/EkiOrunduuOnduktar_Boluu_SandykTabyshmak_6PvOkjz.pptx
@@ -23998,7 +23998,7 @@
           <a:p>
             <a:r>
               <a:rPr lang="en-GB" sz="2400" dirty="0"/>
-              <a:t>3.4 ÷ 0.2 = 17</a:t>
+              <a:t>3,4 ÷ 0,2 = 17</a:t>
             </a:r>
           </a:p>
         </p:txBody>
@@ -24627,7 +24627,7 @@
           <a:p>
             <a:r>
               <a:rPr lang="en-GB" sz="2400" dirty="0"/>
-              <a:t>8.1 ÷ 0.3 = 27</a:t>
+              <a:t>8,1 ÷ 0,3 = 27</a:t>
             </a:r>
           </a:p>
         </p:txBody>
@@ -24662,7 +24662,7 @@
           <a:p>
             <a:r>
               <a:rPr lang="en-GB" sz="2400" dirty="0"/>
-              <a:t>1.4 ÷ 0.7 = 02</a:t>
+              <a:t>1,4 ÷ 0,7 = 02</a:t>
             </a:r>
           </a:p>
         </p:txBody>
@@ -24697,7 +24697,7 @@
           <a:p>
             <a:r>
               <a:rPr lang="en-GB" sz="2400" dirty="0"/>
-              <a:t>9.6 ÷ 0.8 = 12</a:t>
+              <a:t>9,6 ÷ 0,8 = 12</a:t>
             </a:r>
           </a:p>
         </p:txBody>
@@ -25492,7 +25492,7 @@
             <a:pPr algn="ctr"/>
             <a:r>
               <a:rPr lang="en-GB" sz="2400" dirty="0"/>
-              <a:t>3.6 ÷ 0.4 = 9</a:t>
+              <a:t>3,6 ÷ 0,4 = 9</a:t>
             </a:r>
           </a:p>
         </p:txBody>
@@ -25528,7 +25528,7 @@
             <a:pPr algn="ctr"/>
             <a:r>
               <a:rPr lang="en-GB" sz="2400" dirty="0"/>
-              <a:t>6.0 ÷ 1.2 = 5</a:t>
+              <a:t>6,0 ÷ 1,2 = 5</a:t>
             </a:r>
           </a:p>
         </p:txBody>
@@ -25564,7 +25564,7 @@
             <a:pPr algn="ctr"/>
             <a:r>
               <a:rPr lang="en-GB" sz="2400" dirty="0"/>
-              <a:t>2.8 ÷ 0.7 = 4</a:t>
+              <a:t>2,8 ÷ 0,7 = 4</a:t>
             </a:r>
           </a:p>
         </p:txBody>
@@ -25600,7 +25600,7 @@
             <a:pPr algn="ctr"/>
             <a:r>
               <a:rPr lang="en-GB" sz="2400" dirty="0"/>
-              <a:t>3.2 ÷ 0.4 = 8</a:t>
+              <a:t>3,2 ÷ 0,4 = 8</a:t>
             </a:r>
           </a:p>
         </p:txBody>
@@ -26174,7 +26174,7 @@
             <a:pPr algn="ctr"/>
             <a:r>
               <a:rPr lang="en-GB" sz="2400" dirty="0"/>
-              <a:t>1.4 ÷ 0.7 = 2</a:t>
+              <a:t>1,4 ÷ 0,7 = 2</a:t>
             </a:r>
           </a:p>
         </p:txBody>
@@ -26210,7 +26210,7 @@
             <a:pPr algn="ctr"/>
             <a:r>
               <a:rPr lang="en-GB" sz="2400" dirty="0"/>
-              <a:t>3.0 ÷ 1.5 = 2</a:t>
+              <a:t>3,0 ÷ 1,5 = 2</a:t>
             </a:r>
           </a:p>
         </p:txBody>
@@ -26246,7 +26246,7 @@
             <a:pPr algn="ctr"/>
             <a:r>
               <a:rPr lang="en-GB" sz="2400" dirty="0"/>
-              <a:t>9.0 ÷ 4.5 = 2</a:t>
+              <a:t>9,0 ÷ 4,5 = 2</a:t>
             </a:r>
           </a:p>
         </p:txBody>
@@ -26282,7 +26282,7 @@
             <a:pPr algn="ctr"/>
             <a:r>
               <a:rPr lang="en-GB" sz="2400" dirty="0"/>
-              <a:t>4.8 ÷ 1.6 = 3</a:t>
+              <a:t>4,8 ÷ 1,6 = 3</a:t>
             </a:r>
           </a:p>
         </p:txBody>
@@ -27083,7 +27083,7 @@
           <a:p>
             <a:r>
               <a:rPr lang="en-GB" sz="2400" dirty="0"/>
-              <a:t>2.7 ÷ 0.45 = 06</a:t>
+              <a:t>2,7 ÷ 0,45 = 06</a:t>
             </a:r>
           </a:p>
         </p:txBody>
@@ -27118,7 +27118,7 @@
           <a:p>
             <a:r>
               <a:rPr lang="en-GB" sz="2400" dirty="0"/>
-              <a:t>9.6 ÷ 0.12 = 80</a:t>
+              <a:t>9,6 ÷ 0,12 = 80</a:t>
             </a:r>
           </a:p>
         </p:txBody>
@@ -27153,7 +27153,7 @@
           <a:p>
             <a:r>
               <a:rPr lang="en-GB" sz="2400" dirty="0"/>
-              <a:t>3.8 ÷ 0.95 = 04</a:t>
+              <a:t>3,8 ÷ 0,95 = 04</a:t>
             </a:r>
           </a:p>
         </p:txBody>
@@ -27844,7 +27844,7 @@
           <a:p>
             <a:r>
               <a:rPr lang="en-GB" sz="2400" dirty="0"/>
-              <a:t>8.6 ÷ 0.20 = 43</a:t>
+              <a:t>8,6 ÷ 0,20 = 43</a:t>
             </a:r>
           </a:p>
         </p:txBody>
@@ -28315,7 +28315,7 @@
           <a:p>
             <a:r>
               <a:rPr lang="en-GB" sz="2400" dirty="0"/>
-              <a:t>3.6 ÷ 0.15 = 24</a:t>
+              <a:t>3,6 ÷ 0,15 = 24</a:t>
             </a:r>
           </a:p>
         </p:txBody>
